--- a/decks/geog-weather-climate/geog-weather-climate_ch5_tropical-cyclones.pptx
+++ b/decks/geog-weather-climate/geog-weather-climate_ch5_tropical-cyclones.pptx
@@ -124,29 +124,29 @@
   <p:extLst>
     <p:ext uri="{521415D9-36F7-43E2-AB2F-B90AF26B5E84}">
       <p14:sectionLst xmlns:p14="http://schemas.microsoft.com/office/powerpoint/2010/main">
-        <p14:section name="Opening" id="{7df7b8cc-b9fa-8e2d-9083-f621370c9816}">
+        <p14:section name="Opening" id="{19fd3a56-b308-f1cd-8983-f1c2307e422d}">
           <p14:sldIdLst>
             <p14:sldId id="256"/>
           </p14:sldIdLst>
         </p14:section>
-        <p14:section name="Gate" id="{4fc82007-20e2-dd88-34d9-a523138fdeb4}">
+        <p14:section name="Gate" id="{aac4bfe3-03ba-3b8e-b3c9-e01cd173638d}">
           <p14:sldIdLst>
             <p14:sldId id="257"/>
             <p14:sldId id="258"/>
           </p14:sldIdLst>
         </p14:section>
-        <p14:section name="Pre-teach" id="{b9a2b604-ebb4-2ebb-5e6e-5abd57ac8580}">
+        <p14:section name="Pre-teach" id="{bb3133da-898b-8056-e758-70e919d77602}">
           <p14:sldIdLst>
             <p14:sldId id="259"/>
           </p14:sldIdLst>
         </p14:section>
-        <p14:section name="Read-along" id="{8c483359-8b40-729b-fadd-d1215500eb7e}">
+        <p14:section name="Read-along" id="{f1eb69fc-4a52-fbde-970e-2f0b3af3f737}">
           <p14:sldIdLst>
             <p14:sldId id="260"/>
             <p14:sldId id="261"/>
           </p14:sldIdLst>
         </p14:section>
-        <p14:section name="Teach" id="{bd8a15b9-741a-263c-2f75-697f8ac97372}">
+        <p14:section name="Teach" id="{140f7211-9173-2891-bc96-c6d1873883be}">
           <p14:sldIdLst>
             <p14:sldId id="262"/>
             <p14:sldId id="263"/>
@@ -154,7 +154,7 @@
             <p14:sldId id="265"/>
           </p14:sldIdLst>
         </p14:section>
-        <p14:section name="Routes" id="{fd2ddd98-9421-6023-cd82-040abe1fc349}">
+        <p14:section name="Routes" id="{f57aff6b-0161-2c54-f4e6-afe5323e4906}">
           <p14:sldIdLst>
             <p14:sldId id="266"/>
             <p14:sldId id="267"/>
@@ -162,12 +162,12 @@
             <p14:sldId id="269"/>
           </p14:sldIdLst>
         </p14:section>
-        <p14:section name="Close" id="{9a0b97f0-9d8d-8cfe-36ed-55867627db24}">
+        <p14:section name="Close" id="{9809ac26-04fb-361b-04ea-c5a967401bcb}">
           <p14:sldIdLst>
             <p14:sldId id="270"/>
           </p14:sldIdLst>
         </p14:section>
-        <p14:section name="Answers" id="{c2330baa-6ae6-7fdd-750c-b15fcc2aefe7}">
+        <p14:section name="Answers" id="{d9117424-48ef-62d8-1b88-709905fb1ddb}">
           <p14:sldIdLst>
             <p14:sldId id="271"/>
             <p14:sldId id="272"/>
